--- a/classes/parte-14-grc-riesgo-y-cumplimiento/284-gestion-de-riesgo-de-terceros-y-proveedores/clase-284-presentacion.pptx
+++ b/classes/parte-14-grc-riesgo-y-cumplimiento/284-gestion-de-riesgo-de-terceros-y-proveedores/clase-284-presentacion.pptx
@@ -17,6 +17,10 @@
     <p:sldId id="265" r:id="rId16"/>
     <p:sldId id="266" r:id="rId17"/>
     <p:sldId id="267" r:id="rId18"/>
+    <p:sldId id="268" r:id="rId19"/>
+    <p:sldId id="269" r:id="rId20"/>
+    <p:sldId id="270" r:id="rId21"/>
+    <p:sldId id="271" r:id="rId22"/>
   </p:sldIdLst>
   <p:sldSz cx="9144000" cy="6858000" type="screen4x3"/>
   <p:notesSz cx="6858000" cy="9144000"/>
@@ -3198,7 +3202,7 @@
                   <a:srgbClr val="0B3D2E"/>
                 </a:solidFill>
               </a:rPr>
-              <a:t>⚠️ Errores comunes</a:t>
+              <a:t>🧪 Laboratorio guiado (ejercicio aplicado)</a:t>
             </a:r>
           </a:p>
         </p:txBody>
@@ -3236,67 +3240,97 @@
                   <a:srgbClr val="22282E"/>
                 </a:solidFill>
               </a:rPr>
-              <a:t>•  Evaluar al proveedor solo al contratar — El riesgo evoluciona; monitoriza de forma continua</a:t>
-            </a:r>
-          </a:p>
-          <a:p>
-            <a:pPr>
-              <a:spcAft>
-                <a:spcPts val="600"/>
-              </a:spcAft>
-            </a:pPr>
-            <a:r>
-              <a:rPr sz="1500">
-                <a:solidFill>
-                  <a:srgbClr val="22282E"/>
-                </a:solidFill>
-              </a:rPr>
-              <a:t>•  Contrato sin cláusulas de seguridad — No puedes exigir nada tras una brecha; inclúyelas antes de firmar</a:t>
-            </a:r>
-          </a:p>
-          <a:p>
-            <a:pPr>
-              <a:spcAft>
-                <a:spcPts val="600"/>
-              </a:spcAft>
-            </a:pPr>
-            <a:r>
-              <a:rPr sz="1500">
-                <a:solidFill>
-                  <a:srgbClr val="22282E"/>
-                </a:solidFill>
-              </a:rPr>
-              <a:t>•  Ignorar a los subencargados (4ª parte) — Heredas su riesgo; exige transparencia y aprobación</a:t>
-            </a:r>
-          </a:p>
-          <a:p>
-            <a:pPr>
-              <a:spcAft>
-                <a:spcPts val="600"/>
-              </a:spcAft>
-            </a:pPr>
-            <a:r>
-              <a:rPr sz="1500">
-                <a:solidFill>
-                  <a:srgbClr val="22282E"/>
-                </a:solidFill>
-              </a:rPr>
-              <a:t>•  No revocar accesos al terminar — Cuentas huérfanas de terceros; checklist de offboarding</a:t>
-            </a:r>
-          </a:p>
-          <a:p>
-            <a:pPr>
-              <a:spcAft>
-                <a:spcPts val="600"/>
-              </a:spcAft>
-            </a:pPr>
-            <a:r>
-              <a:rPr sz="1500">
-                <a:solidFill>
-                  <a:srgbClr val="22282E"/>
-                </a:solidFill>
-              </a:rPr>
-              <a:t>•  Confiar en el logo "ISO 27001" sin ver el alcance — El certificado puede cubrir otra cosa; pide el SoA/alcance</a:t>
+              <a:t>•  Parte A — Inventario y evaluación para "Ferretería del Sur S.A.":</a:t>
+            </a:r>
+          </a:p>
+          <a:p>
+            <a:pPr>
+              <a:spcAft>
+                <a:spcPts val="600"/>
+              </a:spcAft>
+            </a:pPr>
+            <a:r>
+              <a:rPr sz="1500">
+                <a:solidFill>
+                  <a:srgbClr val="22282E"/>
+                </a:solidFill>
+              </a:rPr>
+              <a:t>•  Inventario de proveedores: lista 6 (pasarela de pago, proveedor cloud, CRM SaaS, agencia de marketing, mensajería, ERP). Para cada uno anota qué datos accede y qué nivel de acceso tiene.</a:t>
+            </a:r>
+          </a:p>
+          <a:p>
+            <a:pPr>
+              <a:spcAft>
+                <a:spcPts val="600"/>
+              </a:spcAft>
+            </a:pPr>
+            <a:r>
+              <a:rPr sz="1500">
+                <a:solidFill>
+                  <a:srgbClr val="22282E"/>
+                </a:solidFill>
+              </a:rPr>
+              <a:t>•  Matriz de criticidad: clasifica cada proveedor en crítico/medio/bajo según acceso a datos sensibles e impacto si falla. La pasarela y el cloud serán críticos.</a:t>
+            </a:r>
+          </a:p>
+          <a:p>
+            <a:pPr>
+              <a:spcAft>
+                <a:spcPts val="600"/>
+              </a:spcAft>
+            </a:pPr>
+            <a:r>
+              <a:rPr sz="1500">
+                <a:solidFill>
+                  <a:srgbClr val="22282E"/>
+                </a:solidFill>
+              </a:rPr>
+              <a:t>•  Due diligence: para el proveedor más crítico, prepara un mini-cuestionario de 10 preguntas basado en CAIQ (¿tiene ISO 27001/SOC 2? ¿cifra datos? ¿notifica brechas en cuánto tiempo? ¿dónde aloja los…</a:t>
+            </a:r>
+          </a:p>
+          <a:p>
+            <a:pPr>
+              <a:spcAft>
+                <a:spcPts val="600"/>
+              </a:spcAft>
+            </a:pPr>
+            <a:r>
+              <a:rPr sz="1500">
+                <a:solidFill>
+                  <a:srgbClr val="22282E"/>
+                </a:solidFill>
+              </a:rPr>
+              <a:t>•  Cláusulas contractuales: redacta 5 cláusulas de seguridad para el contrato: notificación de brechas en 48 h, derecho a auditar, ubicación de datos en la UE, subencargados con aprobación previa…</a:t>
+            </a:r>
+          </a:p>
+          <a:p>
+            <a:pPr>
+              <a:spcAft>
+                <a:spcPts val="600"/>
+              </a:spcAft>
+            </a:pPr>
+            <a:r>
+              <a:rPr sz="1500">
+                <a:solidFill>
+                  <a:srgbClr val="22282E"/>
+                </a:solidFill>
+              </a:rPr>
+              <a:t>•  Parte B — Riesgo de cadena de suministro de software:</a:t>
+            </a:r>
+          </a:p>
+          <a:p>
+            <a:pPr>
+              <a:spcAft>
+                <a:spcPts val="600"/>
+              </a:spcAft>
+            </a:pPr>
+            <a:r>
+              <a:rPr sz="1500">
+                <a:solidFill>
+                  <a:srgbClr val="22282E"/>
+                </a:solidFill>
+              </a:rPr>
+              <a:t>•  Genera un SBOM de una imagen de contenedor en tu laboratorio:</a:t>
             </a:r>
           </a:p>
         </p:txBody>
@@ -3347,7 +3381,7 @@
                   <a:srgbClr val="0B3D2E"/>
                 </a:solidFill>
               </a:rPr>
-              <a:t>❓ Preguntas frecuentes</a:t>
+              <a:t>✍️ Ejercicios</a:t>
             </a:r>
           </a:p>
         </p:txBody>
@@ -3385,97 +3419,82 @@
                   <a:srgbClr val="22282E"/>
                 </a:solidFill>
               </a:rPr>
-              <a:t>•  ❓ ¿Basta con que el proveedor tenga SOC 2 o ISO 27001?</a:t>
-            </a:r>
-          </a:p>
-          <a:p>
-            <a:pPr>
-              <a:spcAft>
-                <a:spcPts val="600"/>
-              </a:spcAft>
-            </a:pPr>
-            <a:r>
-              <a:rPr sz="1500">
-                <a:solidFill>
-                  <a:srgbClr val="22282E"/>
-                </a:solidFill>
-              </a:rPr>
-              <a:t>•  Es buena señal, pero debes verificar el alcance (qué cubre) y que sea vigente. Un certificado no exime de tus propias obligaciones legales sobre los datos.</a:t>
-            </a:r>
-          </a:p>
-          <a:p>
-            <a:pPr>
-              <a:spcAft>
-                <a:spcPts val="600"/>
-              </a:spcAft>
-            </a:pPr>
-            <a:r>
-              <a:rPr sz="1500">
-                <a:solidFill>
-                  <a:srgbClr val="22282E"/>
-                </a:solidFill>
-              </a:rPr>
-              <a:t>•  ❓ ¿Qué diferencia hay entre SIG y CAIQ?</a:t>
-            </a:r>
-          </a:p>
-          <a:p>
-            <a:pPr>
-              <a:spcAft>
-                <a:spcPts val="600"/>
-              </a:spcAft>
-            </a:pPr>
-            <a:r>
-              <a:rPr sz="1500">
-                <a:solidFill>
-                  <a:srgbClr val="22282E"/>
-                </a:solidFill>
-              </a:rPr>
-              <a:t>•  Ambos son cuestionarios de evaluación de proveedores; CAIQ (CSA) está orientado a la nube, SIG (Shared Assessments) es más general. Elige según el tipo de proveedor.</a:t>
-            </a:r>
-          </a:p>
-          <a:p>
-            <a:pPr>
-              <a:spcAft>
-                <a:spcPts val="600"/>
-              </a:spcAft>
-            </a:pPr>
-            <a:r>
-              <a:rPr sz="1500">
-                <a:solidFill>
-                  <a:srgbClr val="22282E"/>
-                </a:solidFill>
-              </a:rPr>
-              <a:t>•  ❓ ¿Por qué importa el SBOM?</a:t>
-            </a:r>
-          </a:p>
-          <a:p>
-            <a:pPr>
-              <a:spcAft>
-                <a:spcPts val="600"/>
-              </a:spcAft>
-            </a:pPr>
-            <a:r>
-              <a:rPr sz="1500">
-                <a:solidFill>
-                  <a:srgbClr val="22282E"/>
-                </a:solidFill>
-              </a:rPr>
-              <a:t>•  Cuando aparece una vulnerabilidad en una librería (Log4Shell), el SBOM te dice en minutos qué productos tuyos y de terceros están afectados, en lugar de días de investigación manual.</a:t>
-            </a:r>
-          </a:p>
-          <a:p>
-            <a:pPr>
-              <a:spcAft>
-                <a:spcPts val="600"/>
-              </a:spcAft>
-            </a:pPr>
-            <a:r>
-              <a:rPr sz="1500">
-                <a:solidFill>
-                  <a:srgbClr val="22282E"/>
-                </a:solidFill>
-              </a:rPr>
-              <a:t>•  ❓ ¿Soy responsable de una brecha en mi proveedor?</a:t>
+              <a:t>•  Explica el ataque a SolarWinds como ejemplo de riesgo de cadena de suministro.</a:t>
+            </a:r>
+          </a:p>
+          <a:p>
+            <a:pPr>
+              <a:spcAft>
+                <a:spcPts val="600"/>
+              </a:spcAft>
+            </a:pPr>
+            <a:r>
+              <a:rPr sz="1500">
+                <a:solidFill>
+                  <a:srgbClr val="22282E"/>
+                </a:solidFill>
+              </a:rPr>
+              <a:t>•  ¿Qué es un proveedor de cuarta parte y por qué te preocupa?</a:t>
+            </a:r>
+          </a:p>
+          <a:p>
+            <a:pPr>
+              <a:spcAft>
+                <a:spcPts val="600"/>
+              </a:spcAft>
+            </a:pPr>
+            <a:r>
+              <a:rPr sz="1500">
+                <a:solidFill>
+                  <a:srgbClr val="22282E"/>
+                </a:solidFill>
+              </a:rPr>
+              <a:t>•  Redacta 3 preguntas clave de due diligence para un SaaS que trata datos personales.</a:t>
+            </a:r>
+          </a:p>
+          <a:p>
+            <a:pPr>
+              <a:spcAft>
+                <a:spcPts val="600"/>
+              </a:spcAft>
+            </a:pPr>
+            <a:r>
+              <a:rPr sz="1500">
+                <a:solidFill>
+                  <a:srgbClr val="22282E"/>
+                </a:solidFill>
+              </a:rPr>
+              <a:t>•  Diseña una matriz de criticidad de proveedores con 2 ejes.</a:t>
+            </a:r>
+          </a:p>
+          <a:p>
+            <a:pPr>
+              <a:spcAft>
+                <a:spcPts val="600"/>
+              </a:spcAft>
+            </a:pPr>
+            <a:r>
+              <a:rPr sz="1500">
+                <a:solidFill>
+                  <a:srgbClr val="22282E"/>
+                </a:solidFill>
+              </a:rPr>
+              <a:t>•  ¿Por qué un SBOM es útil cuando aparece un CVE crítico como Log4Shell?</a:t>
+            </a:r>
+          </a:p>
+          <a:p>
+            <a:pPr>
+              <a:spcAft>
+                <a:spcPts val="600"/>
+              </a:spcAft>
+            </a:pPr>
+            <a:r>
+              <a:rPr sz="1500">
+                <a:solidFill>
+                  <a:srgbClr val="22282E"/>
+                </a:solidFill>
+              </a:rPr>
+              <a:t>•  Enumera los pasos de offboarding seguro de un proveedor con acceso API.</a:t>
             </a:r>
           </a:p>
         </p:txBody>
@@ -3526,7 +3545,7 @@
                   <a:srgbClr val="0B3D2E"/>
                 </a:solidFill>
               </a:rPr>
-              <a:t>🔗 Referencias</a:t>
+              <a:t>📝 Reto verificable</a:t>
             </a:r>
           </a:p>
         </p:txBody>
@@ -3564,6 +3583,438 @@
                   <a:srgbClr val="22282E"/>
                 </a:solidFill>
               </a:rPr>
+              <a:t>•  Entrega un programa TPRM mínimo con: inventario de al menos 6 proveedores clasificados por criticidad, cuestionario de due diligence del proveedor crítico, 5 cláusulas contractuales de seguridad…</a:t>
+            </a:r>
+          </a:p>
+          <a:p>
+            <a:pPr>
+              <a:spcAft>
+                <a:spcPts val="600"/>
+              </a:spcAft>
+            </a:pPr>
+            <a:r>
+              <a:rPr sz="1500">
+                <a:solidFill>
+                  <a:srgbClr val="22282E"/>
+                </a:solidFill>
+              </a:rPr>
+              <a:t>•  Criterio de aceptación: la clasificación de criticidad se justifica por acceso a datos e impacto, las cláusulas incluyen notificación de brechas y derecho a auditar, y el SBOM muestra un componente…</a:t>
+            </a:r>
+          </a:p>
+        </p:txBody>
+      </p:sp>
+    </p:spTree>
+  </p:cSld>
+  <p:clrMapOvr>
+    <a:masterClrMapping/>
+  </p:clrMapOvr>
+</p:sld>
+</file>
+
+<file path=ppt/slides/slide13.xml><?xml version="1.0" encoding="utf-8"?>
+<p:sld xmlns:a="http://schemas.openxmlformats.org/drawingml/2006/main" xmlns:p="http://schemas.openxmlformats.org/presentationml/2006/main" xmlns:r="http://schemas.openxmlformats.org/officeDocument/2006/relationships">
+  <p:cSld>
+    <p:spTree>
+      <p:nvGrpSpPr>
+        <p:cNvPr id="1" name=""/>
+        <p:cNvGrpSpPr/>
+        <p:nvPr/>
+      </p:nvGrpSpPr>
+      <p:grpSpPr/>
+      <p:sp>
+        <p:nvSpPr>
+          <p:cNvPr id="2" name="TextBox 1"/>
+          <p:cNvSpPr txBox="1"/>
+          <p:nvPr/>
+        </p:nvSpPr>
+        <p:spPr>
+          <a:xfrm>
+            <a:off x="457200" y="320040"/>
+            <a:ext cx="8229600" cy="822960"/>
+          </a:xfrm>
+          <a:prstGeom prst="rect">
+            <a:avLst/>
+          </a:prstGeom>
+          <a:noFill/>
+        </p:spPr>
+        <p:txBody>
+          <a:bodyPr wrap="square">
+            <a:spAutoFit/>
+          </a:bodyPr>
+          <a:lstStyle/>
+          <a:p>
+            <a:r>
+              <a:rPr sz="2600" b="1">
+                <a:solidFill>
+                  <a:srgbClr val="0B3D2E"/>
+                </a:solidFill>
+              </a:rPr>
+              <a:t>⚠️ Errores comunes</a:t>
+            </a:r>
+          </a:p>
+        </p:txBody>
+      </p:sp>
+      <p:sp>
+        <p:nvSpPr>
+          <p:cNvPr id="3" name="TextBox 2"/>
+          <p:cNvSpPr txBox="1"/>
+          <p:nvPr/>
+        </p:nvSpPr>
+        <p:spPr>
+          <a:xfrm>
+            <a:off x="457200" y="1280160"/>
+            <a:ext cx="8229600" cy="4937760"/>
+          </a:xfrm>
+          <a:prstGeom prst="rect">
+            <a:avLst/>
+          </a:prstGeom>
+          <a:noFill/>
+        </p:spPr>
+        <p:txBody>
+          <a:bodyPr wrap="square">
+            <a:spAutoFit/>
+          </a:bodyPr>
+          <a:lstStyle/>
+          <a:p>
+            <a:pPr>
+              <a:spcAft>
+                <a:spcPts val="600"/>
+              </a:spcAft>
+            </a:pPr>
+            <a:r>
+              <a:rPr sz="1500">
+                <a:solidFill>
+                  <a:srgbClr val="22282E"/>
+                </a:solidFill>
+              </a:rPr>
+              <a:t>•  Evaluar al proveedor solo al contratar — El riesgo evoluciona; monitoriza de forma continua</a:t>
+            </a:r>
+          </a:p>
+          <a:p>
+            <a:pPr>
+              <a:spcAft>
+                <a:spcPts val="600"/>
+              </a:spcAft>
+            </a:pPr>
+            <a:r>
+              <a:rPr sz="1500">
+                <a:solidFill>
+                  <a:srgbClr val="22282E"/>
+                </a:solidFill>
+              </a:rPr>
+              <a:t>•  Contrato sin cláusulas de seguridad — No puedes exigir nada tras una brecha; inclúyelas antes de firmar</a:t>
+            </a:r>
+          </a:p>
+          <a:p>
+            <a:pPr>
+              <a:spcAft>
+                <a:spcPts val="600"/>
+              </a:spcAft>
+            </a:pPr>
+            <a:r>
+              <a:rPr sz="1500">
+                <a:solidFill>
+                  <a:srgbClr val="22282E"/>
+                </a:solidFill>
+              </a:rPr>
+              <a:t>•  Ignorar a los subencargados (4ª parte) — Heredas su riesgo; exige transparencia y aprobación</a:t>
+            </a:r>
+          </a:p>
+          <a:p>
+            <a:pPr>
+              <a:spcAft>
+                <a:spcPts val="600"/>
+              </a:spcAft>
+            </a:pPr>
+            <a:r>
+              <a:rPr sz="1500">
+                <a:solidFill>
+                  <a:srgbClr val="22282E"/>
+                </a:solidFill>
+              </a:rPr>
+              <a:t>•  No revocar accesos al terminar — Cuentas huérfanas de terceros; checklist de offboarding</a:t>
+            </a:r>
+          </a:p>
+          <a:p>
+            <a:pPr>
+              <a:spcAft>
+                <a:spcPts val="600"/>
+              </a:spcAft>
+            </a:pPr>
+            <a:r>
+              <a:rPr sz="1500">
+                <a:solidFill>
+                  <a:srgbClr val="22282E"/>
+                </a:solidFill>
+              </a:rPr>
+              <a:t>•  Confiar en el logo "ISO 27001" sin ver el alcance — El certificado puede cubrir otra cosa; pide el SoA/alcance</a:t>
+            </a:r>
+          </a:p>
+        </p:txBody>
+      </p:sp>
+    </p:spTree>
+  </p:cSld>
+  <p:clrMapOvr>
+    <a:masterClrMapping/>
+  </p:clrMapOvr>
+</p:sld>
+</file>
+
+<file path=ppt/slides/slide14.xml><?xml version="1.0" encoding="utf-8"?>
+<p:sld xmlns:a="http://schemas.openxmlformats.org/drawingml/2006/main" xmlns:p="http://schemas.openxmlformats.org/presentationml/2006/main" xmlns:r="http://schemas.openxmlformats.org/officeDocument/2006/relationships">
+  <p:cSld>
+    <p:spTree>
+      <p:nvGrpSpPr>
+        <p:cNvPr id="1" name=""/>
+        <p:cNvGrpSpPr/>
+        <p:nvPr/>
+      </p:nvGrpSpPr>
+      <p:grpSpPr/>
+      <p:sp>
+        <p:nvSpPr>
+          <p:cNvPr id="2" name="TextBox 1"/>
+          <p:cNvSpPr txBox="1"/>
+          <p:nvPr/>
+        </p:nvSpPr>
+        <p:spPr>
+          <a:xfrm>
+            <a:off x="457200" y="320040"/>
+            <a:ext cx="8229600" cy="822960"/>
+          </a:xfrm>
+          <a:prstGeom prst="rect">
+            <a:avLst/>
+          </a:prstGeom>
+          <a:noFill/>
+        </p:spPr>
+        <p:txBody>
+          <a:bodyPr wrap="square">
+            <a:spAutoFit/>
+          </a:bodyPr>
+          <a:lstStyle/>
+          <a:p>
+            <a:r>
+              <a:rPr sz="2600" b="1">
+                <a:solidFill>
+                  <a:srgbClr val="0B3D2E"/>
+                </a:solidFill>
+              </a:rPr>
+              <a:t>❓ Preguntas frecuentes</a:t>
+            </a:r>
+          </a:p>
+        </p:txBody>
+      </p:sp>
+      <p:sp>
+        <p:nvSpPr>
+          <p:cNvPr id="3" name="TextBox 2"/>
+          <p:cNvSpPr txBox="1"/>
+          <p:nvPr/>
+        </p:nvSpPr>
+        <p:spPr>
+          <a:xfrm>
+            <a:off x="457200" y="1280160"/>
+            <a:ext cx="8229600" cy="4937760"/>
+          </a:xfrm>
+          <a:prstGeom prst="rect">
+            <a:avLst/>
+          </a:prstGeom>
+          <a:noFill/>
+        </p:spPr>
+        <p:txBody>
+          <a:bodyPr wrap="square">
+            <a:spAutoFit/>
+          </a:bodyPr>
+          <a:lstStyle/>
+          <a:p>
+            <a:pPr>
+              <a:spcAft>
+                <a:spcPts val="600"/>
+              </a:spcAft>
+            </a:pPr>
+            <a:r>
+              <a:rPr sz="1500">
+                <a:solidFill>
+                  <a:srgbClr val="22282E"/>
+                </a:solidFill>
+              </a:rPr>
+              <a:t>•  ❓ ¿Basta con que el proveedor tenga SOC 2 o ISO 27001?</a:t>
+            </a:r>
+          </a:p>
+          <a:p>
+            <a:pPr>
+              <a:spcAft>
+                <a:spcPts val="600"/>
+              </a:spcAft>
+            </a:pPr>
+            <a:r>
+              <a:rPr sz="1500">
+                <a:solidFill>
+                  <a:srgbClr val="22282E"/>
+                </a:solidFill>
+              </a:rPr>
+              <a:t>•  Es buena señal, pero debes verificar el alcance (qué cubre) y que sea vigente. Un certificado no exime de tus propias obligaciones legales sobre los datos.</a:t>
+            </a:r>
+          </a:p>
+          <a:p>
+            <a:pPr>
+              <a:spcAft>
+                <a:spcPts val="600"/>
+              </a:spcAft>
+            </a:pPr>
+            <a:r>
+              <a:rPr sz="1500">
+                <a:solidFill>
+                  <a:srgbClr val="22282E"/>
+                </a:solidFill>
+              </a:rPr>
+              <a:t>•  ❓ ¿Qué diferencia hay entre SIG y CAIQ?</a:t>
+            </a:r>
+          </a:p>
+          <a:p>
+            <a:pPr>
+              <a:spcAft>
+                <a:spcPts val="600"/>
+              </a:spcAft>
+            </a:pPr>
+            <a:r>
+              <a:rPr sz="1500">
+                <a:solidFill>
+                  <a:srgbClr val="22282E"/>
+                </a:solidFill>
+              </a:rPr>
+              <a:t>•  Ambos son cuestionarios de evaluación de proveedores; CAIQ (CSA) está orientado a la nube, SIG (Shared Assessments) es más general. Elige según el tipo de proveedor.</a:t>
+            </a:r>
+          </a:p>
+          <a:p>
+            <a:pPr>
+              <a:spcAft>
+                <a:spcPts val="600"/>
+              </a:spcAft>
+            </a:pPr>
+            <a:r>
+              <a:rPr sz="1500">
+                <a:solidFill>
+                  <a:srgbClr val="22282E"/>
+                </a:solidFill>
+              </a:rPr>
+              <a:t>•  ❓ ¿Por qué importa el SBOM?</a:t>
+            </a:r>
+          </a:p>
+          <a:p>
+            <a:pPr>
+              <a:spcAft>
+                <a:spcPts val="600"/>
+              </a:spcAft>
+            </a:pPr>
+            <a:r>
+              <a:rPr sz="1500">
+                <a:solidFill>
+                  <a:srgbClr val="22282E"/>
+                </a:solidFill>
+              </a:rPr>
+              <a:t>•  Cuando aparece una vulnerabilidad en una librería (Log4Shell), el SBOM te dice en minutos qué productos tuyos y de terceros están afectados, en lugar de días de investigación manual.</a:t>
+            </a:r>
+          </a:p>
+          <a:p>
+            <a:pPr>
+              <a:spcAft>
+                <a:spcPts val="600"/>
+              </a:spcAft>
+            </a:pPr>
+            <a:r>
+              <a:rPr sz="1500">
+                <a:solidFill>
+                  <a:srgbClr val="22282E"/>
+                </a:solidFill>
+              </a:rPr>
+              <a:t>•  ❓ ¿Soy responsable de una brecha en mi proveedor?</a:t>
+            </a:r>
+          </a:p>
+        </p:txBody>
+      </p:sp>
+    </p:spTree>
+  </p:cSld>
+  <p:clrMapOvr>
+    <a:masterClrMapping/>
+  </p:clrMapOvr>
+</p:sld>
+</file>
+
+<file path=ppt/slides/slide15.xml><?xml version="1.0" encoding="utf-8"?>
+<p:sld xmlns:a="http://schemas.openxmlformats.org/drawingml/2006/main" xmlns:p="http://schemas.openxmlformats.org/presentationml/2006/main" xmlns:r="http://schemas.openxmlformats.org/officeDocument/2006/relationships">
+  <p:cSld>
+    <p:spTree>
+      <p:nvGrpSpPr>
+        <p:cNvPr id="1" name=""/>
+        <p:cNvGrpSpPr/>
+        <p:nvPr/>
+      </p:nvGrpSpPr>
+      <p:grpSpPr/>
+      <p:sp>
+        <p:nvSpPr>
+          <p:cNvPr id="2" name="TextBox 1"/>
+          <p:cNvSpPr txBox="1"/>
+          <p:nvPr/>
+        </p:nvSpPr>
+        <p:spPr>
+          <a:xfrm>
+            <a:off x="457200" y="320040"/>
+            <a:ext cx="8229600" cy="822960"/>
+          </a:xfrm>
+          <a:prstGeom prst="rect">
+            <a:avLst/>
+          </a:prstGeom>
+          <a:noFill/>
+        </p:spPr>
+        <p:txBody>
+          <a:bodyPr wrap="square">
+            <a:spAutoFit/>
+          </a:bodyPr>
+          <a:lstStyle/>
+          <a:p>
+            <a:r>
+              <a:rPr sz="2600" b="1">
+                <a:solidFill>
+                  <a:srgbClr val="0B3D2E"/>
+                </a:solidFill>
+              </a:rPr>
+              <a:t>🔗 Referencias</a:t>
+            </a:r>
+          </a:p>
+        </p:txBody>
+      </p:sp>
+      <p:sp>
+        <p:nvSpPr>
+          <p:cNvPr id="3" name="TextBox 2"/>
+          <p:cNvSpPr txBox="1"/>
+          <p:nvPr/>
+        </p:nvSpPr>
+        <p:spPr>
+          <a:xfrm>
+            <a:off x="457200" y="1280160"/>
+            <a:ext cx="8229600" cy="4937760"/>
+          </a:xfrm>
+          <a:prstGeom prst="rect">
+            <a:avLst/>
+          </a:prstGeom>
+          <a:noFill/>
+        </p:spPr>
+        <p:txBody>
+          <a:bodyPr wrap="square">
+            <a:spAutoFit/>
+          </a:bodyPr>
+          <a:lstStyle/>
+          <a:p>
+            <a:pPr>
+              <a:spcAft>
+                <a:spcPts val="600"/>
+              </a:spcAft>
+            </a:pPr>
+            <a:r>
+              <a:rPr sz="1500">
+                <a:solidFill>
+                  <a:srgbClr val="22282E"/>
+                </a:solidFill>
+              </a:rPr>
               <a:t>•  NIST SP 800-161 Rev.1 — Supply Chain Risk Management. &lt;https://csrc.nist.gov/pubs/sp/800/161/r1/final&gt;</a:t>
             </a:r>
           </a:p>
@@ -3629,6 +4080,81 @@
           </a:p>
         </p:txBody>
       </p:sp>
+    </p:spTree>
+  </p:cSld>
+  <p:clrMapOvr>
+    <a:masterClrMapping/>
+  </p:clrMapOvr>
+</p:sld>
+</file>
+
+<file path=ppt/slides/slide16.xml><?xml version="1.0" encoding="utf-8"?>
+<p:sld xmlns:a="http://schemas.openxmlformats.org/drawingml/2006/main" xmlns:p="http://schemas.openxmlformats.org/presentationml/2006/main" xmlns:r="http://schemas.openxmlformats.org/officeDocument/2006/relationships">
+  <p:cSld>
+    <p:spTree>
+      <p:nvGrpSpPr>
+        <p:cNvPr id="1" name=""/>
+        <p:cNvGrpSpPr/>
+        <p:nvPr/>
+      </p:nvGrpSpPr>
+      <p:grpSpPr/>
+      <p:sp>
+        <p:nvSpPr>
+          <p:cNvPr id="2" name="TextBox 1"/>
+          <p:cNvSpPr txBox="1"/>
+          <p:nvPr/>
+        </p:nvSpPr>
+        <p:spPr>
+          <a:xfrm>
+            <a:off x="457200" y="274320"/>
+            <a:ext cx="8229600" cy="640080"/>
+          </a:xfrm>
+          <a:prstGeom prst="rect">
+            <a:avLst/>
+          </a:prstGeom>
+          <a:noFill/>
+        </p:spPr>
+        <p:txBody>
+          <a:bodyPr wrap="square">
+            <a:spAutoFit/>
+          </a:bodyPr>
+          <a:lstStyle/>
+          <a:p>
+            <a:r>
+              <a:rPr sz="2200" b="1">
+                <a:solidFill>
+                  <a:srgbClr val="0B3D2E"/>
+                </a:solidFill>
+              </a:rPr>
+              <a:t>Diagrama de la clase</a:t>
+            </a:r>
+          </a:p>
+        </p:txBody>
+      </p:sp>
+      <p:pic>
+        <p:nvPicPr>
+          <p:cNvPr id="3" name="Picture 2" descr="e901bc638d2ad4fc.png"/>
+          <p:cNvPicPr>
+            <a:picLocks noChangeAspect="1"/>
+          </p:cNvPicPr>
+          <p:nvPr/>
+        </p:nvPicPr>
+        <p:blipFill>
+          <a:blip r:embed="rId2"/>
+          <a:stretch>
+            <a:fillRect/>
+          </a:stretch>
+        </p:blipFill>
+        <p:spPr>
+          <a:xfrm>
+            <a:off x="457200" y="3438144"/>
+            <a:ext cx="8229600" cy="621792"/>
+          </a:xfrm>
+          <a:prstGeom prst="rect">
+            <a:avLst/>
+          </a:prstGeom>
+        </p:spPr>
+      </p:pic>
     </p:spTree>
   </p:cSld>
   <p:clrMapOvr>
@@ -3713,7 +4239,7 @@
                   <a:srgbClr val="22282E"/>
                 </a:solidFill>
               </a:rPr>
-              <a:t>•  Aprender a gestionar el riesgo que introducen proveedores, subcontratistas y la cadena de suministro de software (TPRM, Third-Party Risk Management). Incidentes como SolarWinds, Log4j o MOVEit demostraron que la mayor amenaza a menudo entra por un tercero de confianza. Al terminar sabrás evaluar proveedores, exigir cláusulas contractuales de seguridad, gestionar el ciclo de vida del proveedor y responder a un compromiso en la cadena de suministro.</a:t>
+              <a:t>•  Aprender a gestionar el riesgo que introducen proveedores, subcontratistas y la cadena de suministro de software (TPRM, Third-Party Risk Management). Incidentes como SolarWinds, Log4j o MOVEit…</a:t>
             </a:r>
           </a:p>
         </p:txBody>
@@ -4107,7 +4633,7 @@
                   <a:srgbClr val="0B3D2E"/>
                 </a:solidFill>
               </a:rPr>
-              <a:t>📖 Definiciones y características</a:t>
+              <a:t>🧠 Explicación en profundidad</a:t>
             </a:r>
           </a:p>
         </p:txBody>
@@ -4145,97 +4671,22 @@
                   <a:srgbClr val="22282E"/>
                 </a:solidFill>
               </a:rPr>
-              <a:t>•  TPRM: gestión del riesgo de terceros a lo largo de todo su ciclo de vida. Clave: proceso continuo, no un chequeo único.</a:t>
-            </a:r>
-          </a:p>
-          <a:p>
-            <a:pPr>
-              <a:spcAft>
-                <a:spcPts val="600"/>
-              </a:spcAft>
-            </a:pPr>
-            <a:r>
-              <a:rPr sz="1500">
-                <a:solidFill>
-                  <a:srgbClr val="22282E"/>
-                </a:solidFill>
-              </a:rPr>
-              <a:t>•  Due diligence: investigación previa del proveedor (financiera, de seguridad, legal). Clave: antes de firmar.</a:t>
-            </a:r>
-          </a:p>
-          <a:p>
-            <a:pPr>
-              <a:spcAft>
-                <a:spcPts val="600"/>
-              </a:spcAft>
-            </a:pPr>
-            <a:r>
-              <a:rPr sz="1500">
-                <a:solidFill>
-                  <a:srgbClr val="22282E"/>
-                </a:solidFill>
-              </a:rPr>
-              <a:t>•  Cuestionario de seguridad: SIG (Shared Assessments) o CAIQ (Cloud Security Alliance) para evaluar controles. Clave: estandariza la evaluación.</a:t>
-            </a:r>
-          </a:p>
-          <a:p>
-            <a:pPr>
-              <a:spcAft>
-                <a:spcPts val="600"/>
-              </a:spcAft>
-            </a:pPr>
-            <a:r>
-              <a:rPr sz="1500">
-                <a:solidFill>
-                  <a:srgbClr val="22282E"/>
-                </a:solidFill>
-              </a:rPr>
-              <a:t>•  SLA (Service Level Agreement): compromiso de nivel de servicio medible. Clave: incluye disponibilidad, soporte y seguridad.</a:t>
-            </a:r>
-          </a:p>
-          <a:p>
-            <a:pPr>
-              <a:spcAft>
-                <a:spcPts val="600"/>
-              </a:spcAft>
-            </a:pPr>
-            <a:r>
-              <a:rPr sz="1500">
-                <a:solidFill>
-                  <a:srgbClr val="22282E"/>
-                </a:solidFill>
-              </a:rPr>
-              <a:t>•  Derecho a auditar (right to audit): cláusula que permite verificar los controles del proveedor. Clave: convierte promesas en verificables.</a:t>
-            </a:r>
-          </a:p>
-          <a:p>
-            <a:pPr>
-              <a:spcAft>
-                <a:spcPts val="600"/>
-              </a:spcAft>
-            </a:pPr>
-            <a:r>
-              <a:rPr sz="1500">
-                <a:solidFill>
-                  <a:srgbClr val="22282E"/>
-                </a:solidFill>
-              </a:rPr>
-              <a:t>•  Cuarta parte: proveedor del que depende tu proveedor. Clave: heredas su riesgo sin controlarlo directamente.</a:t>
-            </a:r>
-          </a:p>
-          <a:p>
-            <a:pPr>
-              <a:spcAft>
-                <a:spcPts val="600"/>
-              </a:spcAft>
-            </a:pPr>
-            <a:r>
-              <a:rPr sz="1500">
-                <a:solidFill>
-                  <a:srgbClr val="22282E"/>
-                </a:solidFill>
-              </a:rPr>
-              <a:t>•  SBOM (Software Bill of Materials): inventario de componentes de un software. Clave: permite saber si te afecta un CVE de una dependencia.</a:t>
+              <a:t>•  El tercero se evalúa por servicio, datos, accesos, concentración y sustituibilidad, no por cuestionario genérico. La diligencia previa establece condiciones; contrato asigna responsabilidades…</a:t>
+            </a:r>
+          </a:p>
+          <a:p>
+            <a:pPr>
+              <a:spcAft>
+                <a:spcPts val="600"/>
+              </a:spcAft>
+            </a:pPr>
+            <a:r>
+              <a:rPr sz="1500">
+                <a:solidFill>
+                  <a:srgbClr val="22282E"/>
+                </a:solidFill>
+              </a:rPr>
+              <a:t>•  Un SaaS posee ISO 27001, pero su subprocesador crítico no está incluido en alcance. Se revisa certificado, SoA, arquitectura y contrato antes de aceptar evidencia.</a:t>
             </a:r>
           </a:p>
         </p:txBody>
@@ -4286,7 +4737,7 @@
                   <a:srgbClr val="0B3D2E"/>
                 </a:solidFill>
               </a:rPr>
-              <a:t>🧰 Herramientas y preparación</a:t>
+              <a:t>📔 Glosario operativo</a:t>
             </a:r>
           </a:p>
         </p:txBody>
@@ -4324,52 +4775,52 @@
                   <a:srgbClr val="22282E"/>
                 </a:solidFill>
               </a:rPr>
-              <a:t>•  Un cuestionario de referencia: CAIQ de Cloud Security Alliance (descarga gratuita) o SIG Lite.</a:t>
-            </a:r>
-          </a:p>
-          <a:p>
-            <a:pPr>
-              <a:spcAft>
-                <a:spcPts val="600"/>
-              </a:spcAft>
-            </a:pPr>
-            <a:r>
-              <a:rPr sz="1500">
-                <a:solidFill>
-                  <a:srgbClr val="22282E"/>
-                </a:solidFill>
-              </a:rPr>
-              <a:t>•  Hoja de cálculo para el inventario y la matriz de criticidad de proveedores.</a:t>
-            </a:r>
-          </a:p>
-          <a:p>
-            <a:pPr>
-              <a:spcAft>
-                <a:spcPts val="600"/>
-              </a:spcAft>
-            </a:pPr>
-            <a:r>
-              <a:rPr sz="1500">
-                <a:solidFill>
-                  <a:srgbClr val="22282E"/>
-                </a:solidFill>
-              </a:rPr>
-              <a:t>•  Para SBOM: herramientas como syft (syft &lt;imagen&gt; genera un SBOM) y grype para cruzarlo con CVEs.</a:t>
-            </a:r>
-          </a:p>
-          <a:p>
-            <a:pPr>
-              <a:spcAft>
-                <a:spcPts val="600"/>
-              </a:spcAft>
-            </a:pPr>
-            <a:r>
-              <a:rPr sz="1500">
-                <a:solidFill>
-                  <a:srgbClr val="22282E"/>
-                </a:solidFill>
-              </a:rPr>
-              <a:t>•  Referencia: NIST SP 800-161 (Cybersecurity Supply Chain Risk Management) y controles SOC 2 Type II.</a:t>
+              <a:t>•  Término — Definición</a:t>
+            </a:r>
+          </a:p>
+          <a:p>
+            <a:pPr>
+              <a:spcAft>
+                <a:spcPts val="600"/>
+              </a:spcAft>
+            </a:pPr>
+            <a:r>
+              <a:rPr sz="1500">
+                <a:solidFill>
+                  <a:srgbClr val="22282E"/>
+                </a:solidFill>
+              </a:rPr>
+              <a:t>•  Cuarta parte — Proveedor utilizado por el tercero.</a:t>
+            </a:r>
+          </a:p>
+          <a:p>
+            <a:pPr>
+              <a:spcAft>
+                <a:spcPts val="600"/>
+              </a:spcAft>
+            </a:pPr>
+            <a:r>
+              <a:rPr sz="1500">
+                <a:solidFill>
+                  <a:srgbClr val="22282E"/>
+                </a:solidFill>
+              </a:rPr>
+              <a:t>•  Concentración — Dependencia común capaz de afectar múltiples servicios.</a:t>
+            </a:r>
+          </a:p>
+          <a:p>
+            <a:pPr>
+              <a:spcAft>
+                <a:spcPts val="600"/>
+              </a:spcAft>
+            </a:pPr>
+            <a:r>
+              <a:rPr sz="1500">
+                <a:solidFill>
+                  <a:srgbClr val="22282E"/>
+                </a:solidFill>
+              </a:rPr>
+              <a:t>•  Exit plan — Ruta probada para terminar relación y recuperar capacidad.</a:t>
             </a:r>
           </a:p>
         </p:txBody>
@@ -4420,7 +4871,7 @@
                   <a:srgbClr val="0B3D2E"/>
                 </a:solidFill>
               </a:rPr>
-              <a:t>🧪 Laboratorio guiado (ejercicio aplicado)</a:t>
+              <a:t>✅ Criterio de dominio</a:t>
             </a:r>
           </a:p>
         </p:txBody>
@@ -4458,97 +4909,7 @@
                   <a:srgbClr val="22282E"/>
                 </a:solidFill>
               </a:rPr>
-              <a:t>•  Parte A — Inventario y evaluación para "Ferretería del Sur S.A.":</a:t>
-            </a:r>
-          </a:p>
-          <a:p>
-            <a:pPr>
-              <a:spcAft>
-                <a:spcPts val="600"/>
-              </a:spcAft>
-            </a:pPr>
-            <a:r>
-              <a:rPr sz="1500">
-                <a:solidFill>
-                  <a:srgbClr val="22282E"/>
-                </a:solidFill>
-              </a:rPr>
-              <a:t>•  Inventario de proveedores: lista 6 (pasarela de pago, proveedor cloud, CRM SaaS, agencia de marketing, mensajería, ERP). Para cada uno anota qué datos accede y qué nivel de acceso tiene.</a:t>
-            </a:r>
-          </a:p>
-          <a:p>
-            <a:pPr>
-              <a:spcAft>
-                <a:spcPts val="600"/>
-              </a:spcAft>
-            </a:pPr>
-            <a:r>
-              <a:rPr sz="1500">
-                <a:solidFill>
-                  <a:srgbClr val="22282E"/>
-                </a:solidFill>
-              </a:rPr>
-              <a:t>•  Matriz de criticidad: clasifica cada proveedor en crítico/medio/bajo según acceso a datos sensibles e impacto si falla. La pasarela y el cloud serán críticos.</a:t>
-            </a:r>
-          </a:p>
-          <a:p>
-            <a:pPr>
-              <a:spcAft>
-                <a:spcPts val="600"/>
-              </a:spcAft>
-            </a:pPr>
-            <a:r>
-              <a:rPr sz="1500">
-                <a:solidFill>
-                  <a:srgbClr val="22282E"/>
-                </a:solidFill>
-              </a:rPr>
-              <a:t>•  Due diligence: para el proveedor más crítico, prepara un mini-cuestionario de 10 preguntas basado en CAIQ (¿tiene ISO 27001/SOC 2? ¿cifra datos? ¿notifica brechas en cuánto tiempo? ¿dónde aloja los datos?).</a:t>
-            </a:r>
-          </a:p>
-          <a:p>
-            <a:pPr>
-              <a:spcAft>
-                <a:spcPts val="600"/>
-              </a:spcAft>
-            </a:pPr>
-            <a:r>
-              <a:rPr sz="1500">
-                <a:solidFill>
-                  <a:srgbClr val="22282E"/>
-                </a:solidFill>
-              </a:rPr>
-              <a:t>•  Cláusulas contractuales: redacta 5 cláusulas de seguridad para el contrato: notificación de brechas en 48 h, derecho a auditar, ubicación de datos en la UE, subencargados con aprobación previa, borrado seguro al finalizar.</a:t>
-            </a:r>
-          </a:p>
-          <a:p>
-            <a:pPr>
-              <a:spcAft>
-                <a:spcPts val="600"/>
-              </a:spcAft>
-            </a:pPr>
-            <a:r>
-              <a:rPr sz="1500">
-                <a:solidFill>
-                  <a:srgbClr val="22282E"/>
-                </a:solidFill>
-              </a:rPr>
-              <a:t>•  Parte B — Riesgo de cadena de suministro de software:</a:t>
-            </a:r>
-          </a:p>
-          <a:p>
-            <a:pPr>
-              <a:spcAft>
-                <a:spcPts val="600"/>
-              </a:spcAft>
-            </a:pPr>
-            <a:r>
-              <a:rPr sz="1500">
-                <a:solidFill>
-                  <a:srgbClr val="22282E"/>
-                </a:solidFill>
-              </a:rPr>
-              <a:t>•  Genera un SBOM de una imagen de contenedor en tu laboratorio:</a:t>
+              <a:t>•  Existe dominio cuando el alumno adapta diligencia al servicio, valida alcance de evidencia y diseña monitoreo, incidente y salida.</a:t>
             </a:r>
           </a:p>
         </p:txBody>
@@ -4599,7 +4960,7 @@
                   <a:srgbClr val="0B3D2E"/>
                 </a:solidFill>
               </a:rPr>
-              <a:t>✍️ Ejercicios</a:t>
+              <a:t>📖 Definiciones y características</a:t>
             </a:r>
           </a:p>
         </p:txBody>
@@ -4637,82 +4998,97 @@
                   <a:srgbClr val="22282E"/>
                 </a:solidFill>
               </a:rPr>
-              <a:t>•  Explica el ataque a SolarWinds como ejemplo de riesgo de cadena de suministro.</a:t>
-            </a:r>
-          </a:p>
-          <a:p>
-            <a:pPr>
-              <a:spcAft>
-                <a:spcPts val="600"/>
-              </a:spcAft>
-            </a:pPr>
-            <a:r>
-              <a:rPr sz="1500">
-                <a:solidFill>
-                  <a:srgbClr val="22282E"/>
-                </a:solidFill>
-              </a:rPr>
-              <a:t>•  ¿Qué es un proveedor de cuarta parte y por qué te preocupa?</a:t>
-            </a:r>
-          </a:p>
-          <a:p>
-            <a:pPr>
-              <a:spcAft>
-                <a:spcPts val="600"/>
-              </a:spcAft>
-            </a:pPr>
-            <a:r>
-              <a:rPr sz="1500">
-                <a:solidFill>
-                  <a:srgbClr val="22282E"/>
-                </a:solidFill>
-              </a:rPr>
-              <a:t>•  Redacta 3 preguntas clave de due diligence para un SaaS que trata datos personales.</a:t>
-            </a:r>
-          </a:p>
-          <a:p>
-            <a:pPr>
-              <a:spcAft>
-                <a:spcPts val="600"/>
-              </a:spcAft>
-            </a:pPr>
-            <a:r>
-              <a:rPr sz="1500">
-                <a:solidFill>
-                  <a:srgbClr val="22282E"/>
-                </a:solidFill>
-              </a:rPr>
-              <a:t>•  Diseña una matriz de criticidad de proveedores con 2 ejes.</a:t>
-            </a:r>
-          </a:p>
-          <a:p>
-            <a:pPr>
-              <a:spcAft>
-                <a:spcPts val="600"/>
-              </a:spcAft>
-            </a:pPr>
-            <a:r>
-              <a:rPr sz="1500">
-                <a:solidFill>
-                  <a:srgbClr val="22282E"/>
-                </a:solidFill>
-              </a:rPr>
-              <a:t>•  ¿Por qué un SBOM es útil cuando aparece un CVE crítico como Log4Shell?</a:t>
-            </a:r>
-          </a:p>
-          <a:p>
-            <a:pPr>
-              <a:spcAft>
-                <a:spcPts val="600"/>
-              </a:spcAft>
-            </a:pPr>
-            <a:r>
-              <a:rPr sz="1500">
-                <a:solidFill>
-                  <a:srgbClr val="22282E"/>
-                </a:solidFill>
-              </a:rPr>
-              <a:t>•  Enumera los pasos de offboarding seguro de un proveedor con acceso API.</a:t>
+              <a:t>•  TPRM: gestión del riesgo de terceros a lo largo de todo su ciclo de vida. Clave: proceso continuo, no un chequeo único.</a:t>
+            </a:r>
+          </a:p>
+          <a:p>
+            <a:pPr>
+              <a:spcAft>
+                <a:spcPts val="600"/>
+              </a:spcAft>
+            </a:pPr>
+            <a:r>
+              <a:rPr sz="1500">
+                <a:solidFill>
+                  <a:srgbClr val="22282E"/>
+                </a:solidFill>
+              </a:rPr>
+              <a:t>•  Due diligence: investigación previa del proveedor (financiera, de seguridad, legal). Clave: antes de firmar.</a:t>
+            </a:r>
+          </a:p>
+          <a:p>
+            <a:pPr>
+              <a:spcAft>
+                <a:spcPts val="600"/>
+              </a:spcAft>
+            </a:pPr>
+            <a:r>
+              <a:rPr sz="1500">
+                <a:solidFill>
+                  <a:srgbClr val="22282E"/>
+                </a:solidFill>
+              </a:rPr>
+              <a:t>•  Cuestionario de seguridad: SIG (Shared Assessments) o CAIQ (Cloud Security Alliance) para evaluar controles. Clave: estandariza la evaluación.</a:t>
+            </a:r>
+          </a:p>
+          <a:p>
+            <a:pPr>
+              <a:spcAft>
+                <a:spcPts val="600"/>
+              </a:spcAft>
+            </a:pPr>
+            <a:r>
+              <a:rPr sz="1500">
+                <a:solidFill>
+                  <a:srgbClr val="22282E"/>
+                </a:solidFill>
+              </a:rPr>
+              <a:t>•  SLA (Service Level Agreement): compromiso de nivel de servicio medible. Clave: incluye disponibilidad, soporte y seguridad.</a:t>
+            </a:r>
+          </a:p>
+          <a:p>
+            <a:pPr>
+              <a:spcAft>
+                <a:spcPts val="600"/>
+              </a:spcAft>
+            </a:pPr>
+            <a:r>
+              <a:rPr sz="1500">
+                <a:solidFill>
+                  <a:srgbClr val="22282E"/>
+                </a:solidFill>
+              </a:rPr>
+              <a:t>•  Derecho a auditar (right to audit): cláusula que permite verificar los controles del proveedor. Clave: convierte promesas en verificables.</a:t>
+            </a:r>
+          </a:p>
+          <a:p>
+            <a:pPr>
+              <a:spcAft>
+                <a:spcPts val="600"/>
+              </a:spcAft>
+            </a:pPr>
+            <a:r>
+              <a:rPr sz="1500">
+                <a:solidFill>
+                  <a:srgbClr val="22282E"/>
+                </a:solidFill>
+              </a:rPr>
+              <a:t>•  Cuarta parte: proveedor del que depende tu proveedor. Clave: heredas su riesgo sin controlarlo directamente.</a:t>
+            </a:r>
+          </a:p>
+          <a:p>
+            <a:pPr>
+              <a:spcAft>
+                <a:spcPts val="600"/>
+              </a:spcAft>
+            </a:pPr>
+            <a:r>
+              <a:rPr sz="1500">
+                <a:solidFill>
+                  <a:srgbClr val="22282E"/>
+                </a:solidFill>
+              </a:rPr>
+              <a:t>•  SBOM (Software Bill of Materials): inventario de componentes de un software. Clave: permite saber si te afecta un CVE de una dependencia.</a:t>
             </a:r>
           </a:p>
         </p:txBody>
@@ -4763,7 +5139,7 @@
                   <a:srgbClr val="0B3D2E"/>
                 </a:solidFill>
               </a:rPr>
-              <a:t>📝 Reto verificable</a:t>
+              <a:t>🧰 Herramientas y preparación</a:t>
             </a:r>
           </a:p>
         </p:txBody>
@@ -4801,22 +5177,52 @@
                   <a:srgbClr val="22282E"/>
                 </a:solidFill>
               </a:rPr>
-              <a:t>•  Entrega un programa TPRM mínimo con: inventario de al menos 6 proveedores clasificados por criticidad, cuestionario de due diligence del proveedor crítico, 5 cláusulas contractuales de seguridad, evidencia de un SBOM con al menos un CVE identificado y una checklist de offboarding.</a:t>
-            </a:r>
-          </a:p>
-          <a:p>
-            <a:pPr>
-              <a:spcAft>
-                <a:spcPts val="600"/>
-              </a:spcAft>
-            </a:pPr>
-            <a:r>
-              <a:rPr sz="1500">
-                <a:solidFill>
-                  <a:srgbClr val="22282E"/>
-                </a:solidFill>
-              </a:rPr>
-              <a:t>•  Criterio de aceptación: la clasificación de criticidad se justifica por acceso a datos e impacto, las cláusulas incluyen notificación de brechas y derecho a auditar, y el SBOM muestra un componente vulnerable con acción propuesta.</a:t>
+              <a:t>•  Un cuestionario de referencia: CAIQ de Cloud Security Alliance (descarga gratuita) o SIG Lite.</a:t>
+            </a:r>
+          </a:p>
+          <a:p>
+            <a:pPr>
+              <a:spcAft>
+                <a:spcPts val="600"/>
+              </a:spcAft>
+            </a:pPr>
+            <a:r>
+              <a:rPr sz="1500">
+                <a:solidFill>
+                  <a:srgbClr val="22282E"/>
+                </a:solidFill>
+              </a:rPr>
+              <a:t>•  Hoja de cálculo para el inventario y la matriz de criticidad de proveedores.</a:t>
+            </a:r>
+          </a:p>
+          <a:p>
+            <a:pPr>
+              <a:spcAft>
+                <a:spcPts val="600"/>
+              </a:spcAft>
+            </a:pPr>
+            <a:r>
+              <a:rPr sz="1500">
+                <a:solidFill>
+                  <a:srgbClr val="22282E"/>
+                </a:solidFill>
+              </a:rPr>
+              <a:t>•  Para SBOM: herramientas como syft (syft &lt;imagen&gt; genera un SBOM) y grype para cruzarlo con CVEs.</a:t>
+            </a:r>
+          </a:p>
+          <a:p>
+            <a:pPr>
+              <a:spcAft>
+                <a:spcPts val="600"/>
+              </a:spcAft>
+            </a:pPr>
+            <a:r>
+              <a:rPr sz="1500">
+                <a:solidFill>
+                  <a:srgbClr val="22282E"/>
+                </a:solidFill>
+              </a:rPr>
+              <a:t>•  Referencia: NIST SP 800-161 (Cybersecurity Supply Chain Risk Management) y controles SOC 2 Type II.</a:t>
             </a:r>
           </a:p>
         </p:txBody>
